--- a/skills/presentations/assets/pptx/examples/05-procurement-proposal.pptx
+++ b/skills/presentations/assets/pptx/examples/05-procurement-proposal.pptx
@@ -5,15 +5,15 @@
     <p:sldMasterId xmlns:r="http://schemas.openxmlformats.org/officeDocument/2006/relationships" id="2147483648" r:id="rId1"/>
   </p:sldMasterIdLst>
   <p:notesMasterIdLst>
-    <p:notesMasterId r:id="R5ef007e2df81415b"/>
+    <p:notesMasterId r:id="R02c6928b334e4728"/>
   </p:notesMasterIdLst>
   <p:sldIdLst>
-    <p:sldId id="256" r:id="R28c5f38bc2604da9"/>
-    <p:sldId id="257" r:id="Re053e599006d4389"/>
-    <p:sldId id="258" r:id="R68ebea5ebd9e4c2f"/>
-    <p:sldId id="259" r:id="R15cfaea89bc04340"/>
-    <p:sldId id="260" r:id="R2fb063c1b1ec431d"/>
-    <p:sldId id="261" r:id="R616e73dbb7184135"/>
+    <p:sldId id="256" r:id="R5677bdf49a9142fd"/>
+    <p:sldId id="257" r:id="R96aa403a83fd45a1"/>
+    <p:sldId id="258" r:id="Raa59cc385ae34f7a"/>
+    <p:sldId id="259" r:id="R6e3e755135ba4203"/>
+    <p:sldId id="260" r:id="R9f690af368be4f7f"/>
+    <p:sldId id="261" r:id="Rdb57bf8f966e4a2f"/>
   </p:sldIdLst>
   <p:sldSz cx="12192000" cy="6858000"/>
   <p:notesSz cx="6858000" cy="9144000"/>
@@ -1374,7 +1374,7 @@
                 <a:latin typeface="Calibri"/>
                 <a:ea typeface="Calibri"/>
               </a:rPr>
-              <a:t>Why now: contract ends 2026-07-31; farm expand (deck 04) needs seats or queues explode.</a:t>
+              <a:t>Why now: contract ends 2026-07-31; farm expand approved path (deck 04, ask by 5/30) needs seats.</a:t>
             </a:r>
           </a:p>
           <a:p xmlns:a="http://schemas.openxmlformats.org/drawingml/2006/main">
@@ -1398,7 +1398,7 @@
                 <a:latin typeface="Calibri"/>
                 <a:ea typeface="Calibri"/>
               </a:rPr>
-              <a:t>If no / late: sim queue &gt;&gt; overnight; freeze-class slips on next program.</a:t>
+              <a:t>If no / late: sim queue &gt;&gt; overnight; H2 multi-program slips (post-sample).</a:t>
             </a:r>
           </a:p>
         </p:txBody>

--- a/skills/presentations/assets/pptx/examples/05-procurement-proposal.pptx
+++ b/skills/presentations/assets/pptx/examples/05-procurement-proposal.pptx
@@ -5,15 +5,16 @@
     <p:sldMasterId xmlns:r="http://schemas.openxmlformats.org/officeDocument/2006/relationships" id="2147483648" r:id="rId1"/>
   </p:sldMasterIdLst>
   <p:notesMasterIdLst>
-    <p:notesMasterId r:id="R02c6928b334e4728"/>
+    <p:notesMasterId r:id="R8d7006196234461a"/>
   </p:notesMasterIdLst>
   <p:sldIdLst>
-    <p:sldId id="256" r:id="R5677bdf49a9142fd"/>
-    <p:sldId id="257" r:id="R96aa403a83fd45a1"/>
-    <p:sldId id="258" r:id="Raa59cc385ae34f7a"/>
-    <p:sldId id="259" r:id="R6e3e755135ba4203"/>
-    <p:sldId id="260" r:id="R9f690af368be4f7f"/>
-    <p:sldId id="261" r:id="Rdb57bf8f966e4a2f"/>
+    <p:sldId id="256" r:id="Rb330a55aa4354e24"/>
+    <p:sldId id="257" r:id="R9d3dc54512ea431b"/>
+    <p:sldId id="258" r:id="R273d96ec0daf496b"/>
+    <p:sldId id="259" r:id="R6783f762f6e34043"/>
+    <p:sldId id="260" r:id="R8a985a1547a9451b"/>
+    <p:sldId id="261" r:id="R112fccb0fced45ba"/>
+    <p:sldId id="262" r:id="R442c283c6d214af7"/>
   </p:sldIdLst>
   <p:sldSz cx="12192000" cy="6858000"/>
   <p:notesSz cx="6858000" cy="9144000"/>
@@ -479,6 +480,24 @@
               <a:t>Cover (example). Renew HelixSim with expand to match farm and freeze queues.</a:t>
             </a:r>
           </a:p>
+          <a:p xmlns:a="http://schemas.openxmlformats.org/drawingml/2006/main">
+            <a:r>
+              <a:rPr lang="en-US"/>
+              <a:t/>
+            </a:r>
+          </a:p>
+          <a:p xmlns:a="http://schemas.openxmlformats.org/drawingml/2006/main">
+            <a:r>
+              <a:rPr lang="en-US"/>
+              <a:t>Vendor TCO options + procurement lead time</a:t>
+            </a:r>
+          </a:p>
+          <a:p xmlns:a="http://schemas.openxmlformats.org/drawingml/2006/main">
+            <a:r>
+              <a:rPr lang="en-US"/>
+              <a:t>Industry EDA/tool buy case shape (must/should + lead time): https://www.em-tools.io/engineering-manager-responsibilities/headcount-planning</a:t>
+            </a:r>
+          </a:p>
         </p:txBody>
       </p:sp>
     </p:spTree>
@@ -531,7 +550,13 @@
           <a:p xmlns:a="http://schemas.openxmlformats.org/drawingml/2006/main">
             <a:r>
               <a:rPr lang="en-US"/>
-              <a:t>Date includes lead time.</a:t>
+              <a:t>Vendor TCO options + procurement lead time</a:t>
+            </a:r>
+          </a:p>
+          <a:p xmlns:a="http://schemas.openxmlformats.org/drawingml/2006/main">
+            <a:r>
+              <a:rPr lang="en-US"/>
+              <a:t>Industry EDA/tool buy case shape (must/should + lead time): https://www.em-tools.io/engineering-manager-responsibilities/headcount-planning</a:t>
             </a:r>
           </a:p>
         </p:txBody>
@@ -586,7 +611,7 @@
           <a:p xmlns:a="http://schemas.openxmlformats.org/drawingml/2006/main">
             <a:r>
               <a:rPr lang="en-US"/>
-              <a:t>Musts first.</a:t>
+              <a:t>Date includes lead time.</a:t>
             </a:r>
           </a:p>
         </p:txBody>
@@ -641,7 +666,7 @@
           <a:p xmlns:a="http://schemas.openxmlformats.org/drawingml/2006/main">
             <a:r>
               <a:rPr lang="en-US"/>
-              <a:t>Adoption metrics explicit.</a:t>
+              <a:t>Musts first.</a:t>
             </a:r>
           </a:p>
         </p:txBody>
@@ -696,7 +721,7 @@
           <a:p xmlns:a="http://schemas.openxmlformats.org/drawingml/2006/main">
             <a:r>
               <a:rPr lang="en-US"/>
-              <a:t>Walk trade-offs; land recommendation.</a:t>
+              <a:t>Adoption metrics explicit.</a:t>
             </a:r>
           </a:p>
         </p:txBody>
@@ -710,6 +735,61 @@
 </file>
 
 <file path=ppt/notesSlides/notesSlide6.xml><?xml version="1.0" encoding="utf-8"?>
+<p:notes xmlns:p="http://schemas.openxmlformats.org/presentationml/2006/main">
+  <p:cSld>
+    <p:spTree>
+      <p:nvGrpSpPr>
+        <p:cNvPr id="1" name=""/>
+        <p:cNvGrpSpPr/>
+        <p:nvPr/>
+      </p:nvGrpSpPr>
+      <p:grpSpPr>
+        <a:xfrm xmlns:a="http://schemas.openxmlformats.org/drawingml/2006/main"/>
+      </p:grpSpPr>
+      <p:sp>
+        <p:nvSpPr>
+          <p:cNvPr id="2" name="Slide Image Placeholder 1"/>
+          <p:cNvSpPr/>
+          <p:nvPr>
+            <p:ph type="sldImg" idx="0"/>
+          </p:nvPr>
+        </p:nvSpPr>
+        <p:spPr/>
+        <p:txBody>
+          <a:bodyPr xmlns:a="http://schemas.openxmlformats.org/drawingml/2006/main"/>
+          <a:lstStyle xmlns:a="http://schemas.openxmlformats.org/drawingml/2006/main"/>
+          <a:p xmlns:a="http://schemas.openxmlformats.org/drawingml/2006/main"/>
+        </p:txBody>
+      </p:sp>
+      <p:sp>
+        <p:nvSpPr>
+          <p:cNvPr id="3" name="Notes Placeholder 2"/>
+          <p:cNvSpPr/>
+          <p:nvPr>
+            <p:ph type="body" idx="1"/>
+          </p:nvPr>
+        </p:nvSpPr>
+        <p:spPr/>
+        <p:txBody>
+          <a:bodyPr xmlns:a="http://schemas.openxmlformats.org/drawingml/2006/main"/>
+          <a:lstStyle xmlns:a="http://schemas.openxmlformats.org/drawingml/2006/main"/>
+          <a:p xmlns:a="http://schemas.openxmlformats.org/drawingml/2006/main">
+            <a:r>
+              <a:rPr lang="en-US"/>
+              <a:t>Walk trade-offs; land recommendation.</a:t>
+            </a:r>
+          </a:p>
+        </p:txBody>
+      </p:sp>
+    </p:spTree>
+  </p:cSld>
+  <p:clrMapOvr>
+    <a:masterClrMapping xmlns:a="http://schemas.openxmlformats.org/drawingml/2006/main"/>
+  </p:clrMapOvr>
+</p:notes>
+</file>
+
+<file path=ppt/notesSlides/notesSlide7.xml><?xml version="1.0" encoding="utf-8"?>
 <p:notes xmlns:p="http://schemas.openxmlformats.org/presentationml/2006/main">
   <p:cSld>
     <p:spTree>
@@ -1079,8 +1159,8 @@
         </p:nvSpPr>
         <p:spPr>
           <a:xfrm xmlns:a="http://schemas.openxmlformats.org/drawingml/2006/main">
-            <a:off x="504000" y="1008000"/>
-            <a:ext cx="11088000" cy="324000"/>
+            <a:off x="504000" y="936000"/>
+            <a:ext cx="11088000" cy="306000"/>
           </a:xfrm>
           <a:prstGeom xmlns:a="http://schemas.openxmlformats.org/drawingml/2006/main" prst="rect">
             <a:avLst/>
@@ -1111,8 +1191,8 @@
         </p:nvSpPr>
         <p:spPr>
           <a:xfrm xmlns:a="http://schemas.openxmlformats.org/drawingml/2006/main">
-            <a:off x="504000" y="1440000"/>
-            <a:ext cx="11088000" cy="936000"/>
+            <a:off x="504000" y="1332000"/>
+            <a:ext cx="11088000" cy="900000"/>
           </a:xfrm>
           <a:prstGeom xmlns:a="http://schemas.openxmlformats.org/drawingml/2006/main" prst="rect">
             <a:avLst/>
@@ -1123,7 +1203,7 @@
           <a:lstStyle xmlns:a="http://schemas.openxmlformats.org/drawingml/2006/main"/>
           <a:p xmlns:a="http://schemas.openxmlformats.org/drawingml/2006/main">
             <a:r>
-              <a:rPr lang="en-US" sz="3400" b="1">
+              <a:rPr lang="en-US" sz="3200" b="1">
                 <a:solidFill>
                   <a:srgbClr val="FFFFFF"/>
                 </a:solidFill>
@@ -1143,8 +1223,8 @@
         </p:nvSpPr>
         <p:spPr>
           <a:xfrm xmlns:a="http://schemas.openxmlformats.org/drawingml/2006/main">
-            <a:off x="504000" y="2520000"/>
-            <a:ext cx="11088000" cy="720000"/>
+            <a:off x="504000" y="2340000"/>
+            <a:ext cx="11088000" cy="648000"/>
           </a:xfrm>
           <a:prstGeom xmlns:a="http://schemas.openxmlformats.org/drawingml/2006/main" prst="rect">
             <a:avLst/>
@@ -1155,7 +1235,7 @@
           <a:lstStyle xmlns:a="http://schemas.openxmlformats.org/drawingml/2006/main"/>
           <a:p xmlns:a="http://schemas.openxmlformats.org/drawingml/2006/main">
             <a:r>
-              <a:rPr lang="en-US" sz="1700" b="0">
+              <a:rPr lang="en-US" sz="1600" b="0">
                 <a:solidFill>
                   <a:srgbClr val="CADCFC"/>
                 </a:solidFill>
@@ -1170,6 +1250,38 @@
       <p:sp>
         <p:nvSpPr>
           <p:cNvPr id="100003" name="TextBox 4"/>
+          <p:cNvSpPr txBox="1"/>
+          <p:nvPr/>
+        </p:nvSpPr>
+        <p:spPr>
+          <a:xfrm xmlns:a="http://schemas.openxmlformats.org/drawingml/2006/main">
+            <a:off x="504000" y="3240000"/>
+            <a:ext cx="11088000" cy="576000"/>
+          </a:xfrm>
+          <a:prstGeom xmlns:a="http://schemas.openxmlformats.org/drawingml/2006/main" prst="rect">
+            <a:avLst/>
+          </a:prstGeom>
+        </p:spPr>
+        <p:txBody>
+          <a:bodyPr xmlns:a="http://schemas.openxmlformats.org/drawingml/2006/main"/>
+          <a:lstStyle xmlns:a="http://schemas.openxmlformats.org/drawingml/2006/main"/>
+          <a:p xmlns:a="http://schemas.openxmlformats.org/drawingml/2006/main">
+            <a:r>
+              <a:rPr lang="en-US" sz="1400" b="0">
+                <a:solidFill>
+                  <a:srgbClr val="A0C4E8"/>
+                </a:solidFill>
+                <a:latin typeface="Calibri"/>
+                <a:ea typeface="Calibri"/>
+              </a:rPr>
+              <a:t>Pattern: Vendor TCO options + procurement lead time</a:t>
+            </a:r>
+          </a:p>
+        </p:txBody>
+      </p:sp>
+      <p:sp>
+        <p:nvSpPr>
+          <p:cNvPr id="100004" name="TextBox 5"/>
           <p:cNvSpPr txBox="1"/>
           <p:nvPr/>
         </p:nvSpPr>
@@ -1205,6 +1317,255 @@
 </file>
 
 <file path=ppt/slides/slide2.xml><?xml version="1.0" encoding="utf-8"?>
+<p:sld xmlns:p="http://schemas.openxmlformats.org/presentationml/2006/main">
+  <p:cSld name="Pattern provenance">
+    <p:bg>
+      <p:bgPr>
+        <a:solidFill xmlns:a="http://schemas.openxmlformats.org/drawingml/2006/main">
+          <a:srgbClr val="F4F7FC"/>
+        </a:solidFill>
+      </p:bgPr>
+    </p:bg>
+    <p:spTree>
+      <p:nvGrpSpPr>
+        <p:cNvPr id="1" name=""/>
+        <p:cNvGrpSpPr/>
+        <p:nvPr/>
+      </p:nvGrpSpPr>
+      <p:grpSpPr/>
+      <p:sp>
+        <p:nvSpPr>
+          <p:cNvPr id="100005" name="TextBox 1"/>
+          <p:cNvSpPr txBox="1"/>
+          <p:nvPr/>
+        </p:nvSpPr>
+        <p:spPr>
+          <a:xfrm xmlns:a="http://schemas.openxmlformats.org/drawingml/2006/main">
+            <a:off x="504000" y="270000"/>
+            <a:ext cx="11088000" cy="270000"/>
+          </a:xfrm>
+          <a:prstGeom xmlns:a="http://schemas.openxmlformats.org/drawingml/2006/main" prst="rect">
+            <a:avLst/>
+          </a:prstGeom>
+        </p:spPr>
+        <p:txBody>
+          <a:bodyPr xmlns:a="http://schemas.openxmlformats.org/drawingml/2006/main"/>
+          <a:lstStyle xmlns:a="http://schemas.openxmlformats.org/drawingml/2006/main"/>
+          <a:p xmlns:a="http://schemas.openxmlformats.org/drawingml/2006/main">
+            <a:r>
+              <a:rPr lang="en-US" sz="1100" b="1">
+                <a:solidFill>
+                  <a:srgbClr val="2B6CB0"/>
+                </a:solidFill>
+                <a:latin typeface="Calibri"/>
+                <a:ea typeface="Calibri"/>
+              </a:rPr>
+              <a:t>WHERE THIS DECK SHAPE COMES FROM</a:t>
+            </a:r>
+          </a:p>
+        </p:txBody>
+      </p:sp>
+      <p:sp>
+        <p:nvSpPr>
+          <p:cNvPr id="100006" name="TextBox 2"/>
+          <p:cNvSpPr txBox="1"/>
+          <p:nvPr/>
+        </p:nvSpPr>
+        <p:spPr>
+          <a:xfrm xmlns:a="http://schemas.openxmlformats.org/drawingml/2006/main">
+            <a:off x="504000" y="558000"/>
+            <a:ext cx="11088000" cy="612000"/>
+          </a:xfrm>
+          <a:prstGeom xmlns:a="http://schemas.openxmlformats.org/drawingml/2006/main" prst="rect">
+            <a:avLst/>
+          </a:prstGeom>
+        </p:spPr>
+        <p:txBody>
+          <a:bodyPr xmlns:a="http://schemas.openxmlformats.org/drawingml/2006/main"/>
+          <a:lstStyle xmlns:a="http://schemas.openxmlformats.org/drawingml/2006/main"/>
+          <a:p xmlns:a="http://schemas.openxmlformats.org/drawingml/2006/main">
+            <a:r>
+              <a:rPr lang="en-US" sz="2800" b="1">
+                <a:solidFill>
+                  <a:srgbClr val="1A202C"/>
+                </a:solidFill>
+                <a:latin typeface="Calibri"/>
+                <a:ea typeface="Calibri"/>
+              </a:rPr>
+              <a:t>Pattern provenance</a:t>
+            </a:r>
+          </a:p>
+        </p:txBody>
+      </p:sp>
+      <p:sp>
+        <p:nvSpPr>
+          <p:cNvPr id="100007" name="TextBox 3"/>
+          <p:cNvSpPr txBox="1"/>
+          <p:nvPr/>
+        </p:nvSpPr>
+        <p:spPr>
+          <a:xfrm xmlns:a="http://schemas.openxmlformats.org/drawingml/2006/main">
+            <a:off x="504000" y="1260000"/>
+            <a:ext cx="11088000" cy="4860000"/>
+          </a:xfrm>
+          <a:prstGeom xmlns:a="http://schemas.openxmlformats.org/drawingml/2006/main" prst="rect">
+            <a:avLst/>
+          </a:prstGeom>
+          <a:solidFill xmlns:a="http://schemas.openxmlformats.org/drawingml/2006/main">
+            <a:srgbClr val="FFFFFF"/>
+          </a:solidFill>
+        </p:spPr>
+        <p:txBody>
+          <a:bodyPr xmlns:a="http://schemas.openxmlformats.org/drawingml/2006/main"/>
+          <a:lstStyle xmlns:a="http://schemas.openxmlformats.org/drawingml/2006/main"/>
+          <a:p xmlns:a="http://schemas.openxmlformats.org/drawingml/2006/main">
+            <a:r>
+              <a:rPr lang="en-US" sz="1500" b="0">
+                <a:solidFill>
+                  <a:srgbClr val="1A202C"/>
+                </a:solidFill>
+                <a:latin typeface="Calibri"/>
+                <a:ea typeface="Calibri"/>
+              </a:rPr>
+              <a:t>Public pattern (structure only — not a confidential company deck):</a:t>
+            </a:r>
+          </a:p>
+          <a:p xmlns:a="http://schemas.openxmlformats.org/drawingml/2006/main">
+            <a:r>
+              <a:rPr lang="en-US" sz="1500" b="0">
+                <a:solidFill>
+                  <a:srgbClr val="1A202C"/>
+                </a:solidFill>
+                <a:latin typeface="Calibri"/>
+                <a:ea typeface="Calibri"/>
+              </a:rPr>
+              <a:t/>
+            </a:r>
+          </a:p>
+          <a:p xmlns:a="http://schemas.openxmlformats.org/drawingml/2006/main">
+            <a:r>
+              <a:rPr lang="en-US" sz="1500" b="0">
+                <a:solidFill>
+                  <a:srgbClr val="1A202C"/>
+                </a:solidFill>
+                <a:latin typeface="Calibri"/>
+                <a:ea typeface="Calibri"/>
+              </a:rPr>
+              <a:t>Vendor TCO options + procurement lead time</a:t>
+            </a:r>
+          </a:p>
+          <a:p xmlns:a="http://schemas.openxmlformats.org/drawingml/2006/main">
+            <a:r>
+              <a:rPr lang="en-US" sz="1500" b="0">
+                <a:solidFill>
+                  <a:srgbClr val="1A202C"/>
+                </a:solidFill>
+                <a:latin typeface="Calibri"/>
+                <a:ea typeface="Calibri"/>
+              </a:rPr>
+              <a:t/>
+            </a:r>
+          </a:p>
+          <a:p xmlns:a="http://schemas.openxmlformats.org/drawingml/2006/main">
+            <a:r>
+              <a:rPr lang="en-US" sz="1500" b="0">
+                <a:solidFill>
+                  <a:srgbClr val="1A202C"/>
+                </a:solidFill>
+                <a:latin typeface="Calibri"/>
+                <a:ea typeface="Calibri"/>
+              </a:rPr>
+              <a:t>• Industry EDA/tool buy case shape (must/should + lead time)</a:t>
+            </a:r>
+          </a:p>
+          <a:p xmlns:a="http://schemas.openxmlformats.org/drawingml/2006/main">
+            <a:r>
+              <a:rPr lang="en-US" sz="1500" b="0">
+                <a:solidFill>
+                  <a:srgbClr val="1A202C"/>
+                </a:solidFill>
+                <a:latin typeface="Calibri"/>
+                <a:ea typeface="Calibri"/>
+              </a:rPr>
+              <a:t>  https://www.em-tools.io/engineering-manager-responsibilities/headcount-planning</a:t>
+            </a:r>
+          </a:p>
+          <a:p xmlns:a="http://schemas.openxmlformats.org/drawingml/2006/main">
+            <a:r>
+              <a:rPr lang="en-US" sz="1500" b="0">
+                <a:solidFill>
+                  <a:srgbClr val="1A202C"/>
+                </a:solidFill>
+                <a:latin typeface="Calibri"/>
+                <a:ea typeface="Calibri"/>
+              </a:rPr>
+              <a:t/>
+            </a:r>
+          </a:p>
+          <a:p xmlns:a="http://schemas.openxmlformats.org/drawingml/2006/main">
+            <a:r>
+              <a:rPr lang="en-US" sz="1500" b="0">
+                <a:solidFill>
+                  <a:srgbClr val="1A202C"/>
+                </a:solidFill>
+                <a:latin typeface="Calibri"/>
+                <a:ea typeface="Calibri"/>
+              </a:rPr>
+              <a:t>How to use: copy section order and decision verbs; replace with your metrics.</a:t>
+            </a:r>
+          </a:p>
+          <a:p xmlns:a="http://schemas.openxmlformats.org/drawingml/2006/main">
+            <a:r>
+              <a:rPr lang="en-US" sz="1500" b="0">
+                <a:solidFill>
+                  <a:srgbClr val="1A202C"/>
+                </a:solidFill>
+                <a:latin typeface="Calibri"/>
+                <a:ea typeface="Calibri"/>
+              </a:rPr>
+              <a:t>In-repo: skills/presentations/classic-public-cases.md</a:t>
+            </a:r>
+          </a:p>
+        </p:txBody>
+      </p:sp>
+      <p:sp>
+        <p:nvSpPr>
+          <p:cNvPr id="100008" name="TextBox 4"/>
+          <p:cNvSpPr txBox="1"/>
+          <p:nvPr/>
+        </p:nvSpPr>
+        <p:spPr>
+          <a:xfrm xmlns:a="http://schemas.openxmlformats.org/drawingml/2006/main">
+            <a:off x="504000" y="6426000"/>
+            <a:ext cx="11088000" cy="306000"/>
+          </a:xfrm>
+          <a:prstGeom xmlns:a="http://schemas.openxmlformats.org/drawingml/2006/main" prst="rect">
+            <a:avLst/>
+          </a:prstGeom>
+        </p:spPr>
+        <p:txBody>
+          <a:bodyPr xmlns:a="http://schemas.openxmlformats.org/drawingml/2006/main"/>
+          <a:lstStyle xmlns:a="http://schemas.openxmlformats.org/drawingml/2006/main"/>
+          <a:p xmlns:a="http://schemas.openxmlformats.org/drawingml/2006/main">
+            <a:r>
+              <a:rPr lang="en-US" sz="1100" b="0">
+                <a:solidFill>
+                  <a:srgbClr val="718096"/>
+                </a:solidFill>
+                <a:latin typeface="Calibri"/>
+                <a:ea typeface="Calibri"/>
+              </a:rPr>
+              <a:t>Atlas Platform  ·  Project Aurora  ·  NovaSemi  ·  2026</a:t>
+            </a:r>
+          </a:p>
+        </p:txBody>
+      </p:sp>
+    </p:spTree>
+  </p:cSld>
+</p:sld>
+</file>
+
+<file path=ppt/slides/slide3.xml><?xml version="1.0" encoding="utf-8"?>
 <p:sld xmlns:p="http://schemas.openxmlformats.org/presentationml/2006/main">
   <p:cSld name="BLUF — renew HelixSim 3yr +20 seats">
     <p:bg>
@@ -1223,7 +1584,7 @@
       <p:grpSpPr/>
       <p:sp>
         <p:nvSpPr>
-          <p:cNvPr id="100004" name="TextBox 1"/>
+          <p:cNvPr id="100009" name="TextBox 1"/>
           <p:cNvSpPr txBox="1"/>
           <p:nvPr/>
         </p:nvSpPr>
@@ -1255,7 +1616,7 @@
       </p:sp>
       <p:sp>
         <p:nvSpPr>
-          <p:cNvPr id="100005" name="TextBox 2"/>
+          <p:cNvPr id="100010" name="TextBox 2"/>
           <p:cNvSpPr txBox="1"/>
           <p:nvPr/>
         </p:nvSpPr>
@@ -1287,7 +1648,7 @@
       </p:sp>
       <p:sp>
         <p:nvSpPr>
-          <p:cNvPr id="100006" name="TextBox 3"/>
+          <p:cNvPr id="100011" name="TextBox 3"/>
           <p:cNvSpPr txBox="1"/>
           <p:nvPr/>
         </p:nvSpPr>
@@ -1322,7 +1683,7 @@
       </p:sp>
       <p:sp>
         <p:nvSpPr>
-          <p:cNvPr id="100007" name="TextBox 4"/>
+          <p:cNvPr id="100012" name="TextBox 4"/>
           <p:cNvSpPr txBox="1"/>
           <p:nvPr/>
         </p:nvSpPr>
@@ -1405,7 +1766,7 @@
       </p:sp>
       <p:sp>
         <p:nvSpPr>
-          <p:cNvPr id="100008" name="TextBox 5"/>
+          <p:cNvPr id="100013" name="TextBox 5"/>
           <p:cNvSpPr txBox="1"/>
           <p:nvPr/>
         </p:nvSpPr>
@@ -1440,7 +1801,7 @@
 </p:sld>
 </file>
 
-<file path=ppt/slides/slide3.xml><?xml version="1.0" encoding="utf-8"?>
+<file path=ppt/slides/slide4.xml><?xml version="1.0" encoding="utf-8"?>
 <p:sld xmlns:p="http://schemas.openxmlformats.org/presentationml/2006/main">
   <p:cSld name="Requirements (must / should)">
     <p:bg>
@@ -1459,7 +1820,7 @@
       <p:grpSpPr/>
       <p:sp>
         <p:nvSpPr>
-          <p:cNvPr id="100009" name="TextBox 1"/>
+          <p:cNvPr id="100014" name="TextBox 1"/>
           <p:cNvSpPr txBox="1"/>
           <p:nvPr/>
         </p:nvSpPr>
@@ -1491,7 +1852,7 @@
       </p:sp>
       <p:sp>
         <p:nvSpPr>
-          <p:cNvPr id="100010" name="TextBox 2"/>
+          <p:cNvPr id="100015" name="TextBox 2"/>
           <p:cNvSpPr txBox="1"/>
           <p:nvPr/>
         </p:nvSpPr>
@@ -1550,7 +1911,7 @@
       </p:sp>
       <p:sp>
         <p:nvSpPr>
-          <p:cNvPr id="100011" name="TextBox 3"/>
+          <p:cNvPr id="100016" name="TextBox 3"/>
           <p:cNvSpPr txBox="1"/>
           <p:nvPr/>
         </p:nvSpPr>
@@ -1585,7 +1946,7 @@
 </p:sld>
 </file>
 
-<file path=ppt/slides/slide4.xml><?xml version="1.0" encoding="utf-8"?>
+<file path=ppt/slides/slide5.xml><?xml version="1.0" encoding="utf-8"?>
 <p:sld xmlns:p="http://schemas.openxmlformats.org/presentationml/2006/main">
   <p:cSld name="Implementation plan">
     <p:bg>
@@ -1604,7 +1965,7 @@
       <p:grpSpPr/>
       <p:sp>
         <p:nvSpPr>
-          <p:cNvPr id="100012" name="TextBox 1"/>
+          <p:cNvPr id="100017" name="TextBox 1"/>
           <p:cNvSpPr txBox="1"/>
           <p:nvPr/>
         </p:nvSpPr>
@@ -1636,7 +1997,7 @@
       </p:sp>
       <p:sp>
         <p:nvSpPr>
-          <p:cNvPr id="100013" name="TextBox 2"/>
+          <p:cNvPr id="100018" name="TextBox 2"/>
           <p:cNvSpPr txBox="1"/>
           <p:nvPr/>
         </p:nvSpPr>
@@ -1731,7 +2092,7 @@
       </p:sp>
       <p:sp>
         <p:nvSpPr>
-          <p:cNvPr id="100014" name="TextBox 3"/>
+          <p:cNvPr id="100019" name="TextBox 3"/>
           <p:cNvSpPr txBox="1"/>
           <p:nvPr/>
         </p:nvSpPr>
@@ -1766,7 +2127,7 @@
 </p:sld>
 </file>
 
-<file path=ppt/slides/slide5.xml><?xml version="1.0" encoding="utf-8"?>
+<file path=ppt/slides/slide6.xml><?xml version="1.0" encoding="utf-8"?>
 <p:sld xmlns:p="http://schemas.openxmlformats.org/presentationml/2006/main">
   <p:cSld name="Options &amp; recommendation">
     <p:bg>
@@ -1785,7 +2146,7 @@
       <p:grpSpPr/>
       <p:sp>
         <p:nvSpPr>
-          <p:cNvPr id="100015" name="TextBox 1"/>
+          <p:cNvPr id="100020" name="TextBox 1"/>
           <p:cNvSpPr txBox="1"/>
           <p:nvPr/>
         </p:nvSpPr>
@@ -1817,7 +2178,7 @@
       </p:sp>
       <p:sp>
         <p:nvSpPr>
-          <p:cNvPr id="100016" name="TextBox 2"/>
+          <p:cNvPr id="100021" name="TextBox 2"/>
           <p:cNvSpPr txBox="1"/>
           <p:nvPr/>
         </p:nvSpPr>
@@ -1849,7 +2210,7 @@
       </p:sp>
       <p:graphicFrame>
         <p:nvGraphicFramePr>
-          <p:cNvPr id="100017" name="Table 1"/>
+          <p:cNvPr id="100022" name="Table 1"/>
           <p:cNvGraphicFramePr/>
           <p:nvPr/>
         </p:nvGraphicFramePr>
@@ -2342,7 +2703,7 @@
       </p:graphicFrame>
       <p:sp>
         <p:nvSpPr>
-          <p:cNvPr id="100018" name="TextBox 3"/>
+          <p:cNvPr id="100023" name="TextBox 3"/>
           <p:cNvSpPr txBox="1"/>
           <p:nvPr/>
         </p:nvSpPr>
@@ -2377,7 +2738,7 @@
 </p:sld>
 </file>
 
-<file path=ppt/slides/slide6.xml><?xml version="1.0" encoding="utf-8"?>
+<file path=ppt/slides/slide7.xml><?xml version="1.0" encoding="utf-8"?>
 <p:sld xmlns:p="http://schemas.openxmlformats.org/presentationml/2006/main">
   <p:cSld name="Decision &amp; ask">
     <p:bg>
@@ -2396,7 +2757,7 @@
       <p:grpSpPr/>
       <p:sp>
         <p:nvSpPr>
-          <p:cNvPr id="100019" name="TextBox 1"/>
+          <p:cNvPr id="100024" name="TextBox 1"/>
           <p:cNvSpPr txBox="1"/>
           <p:nvPr/>
         </p:nvSpPr>
@@ -2428,7 +2789,7 @@
       </p:sp>
       <p:sp>
         <p:nvSpPr>
-          <p:cNvPr id="100020" name="TextBox 2"/>
+          <p:cNvPr id="100025" name="TextBox 2"/>
           <p:cNvSpPr txBox="1"/>
           <p:nvPr/>
         </p:nvSpPr>
@@ -2460,7 +2821,7 @@
       </p:sp>
       <p:sp>
         <p:nvSpPr>
-          <p:cNvPr id="100021" name="TextBox 3"/>
+          <p:cNvPr id="100026" name="TextBox 3"/>
           <p:cNvSpPr txBox="1"/>
           <p:nvPr/>
         </p:nvSpPr>
@@ -2519,7 +2880,7 @@
       </p:sp>
       <p:sp>
         <p:nvSpPr>
-          <p:cNvPr id="100022" name="TextBox 4"/>
+          <p:cNvPr id="100027" name="TextBox 4"/>
           <p:cNvSpPr txBox="1"/>
           <p:nvPr/>
         </p:nvSpPr>

--- a/skills/presentations/assets/pptx/examples/05-procurement-proposal.pptx
+++ b/skills/presentations/assets/pptx/examples/05-procurement-proposal.pptx
@@ -5,16 +5,17 @@
     <p:sldMasterId xmlns:r="http://schemas.openxmlformats.org/officeDocument/2006/relationships" id="2147483648" r:id="rId1"/>
   </p:sldMasterIdLst>
   <p:notesMasterIdLst>
-    <p:notesMasterId r:id="R8d7006196234461a"/>
+    <p:notesMasterId r:id="R5c36316caecb4f22"/>
   </p:notesMasterIdLst>
   <p:sldIdLst>
-    <p:sldId id="256" r:id="Rb330a55aa4354e24"/>
-    <p:sldId id="257" r:id="R9d3dc54512ea431b"/>
-    <p:sldId id="258" r:id="R273d96ec0daf496b"/>
-    <p:sldId id="259" r:id="R6783f762f6e34043"/>
-    <p:sldId id="260" r:id="R8a985a1547a9451b"/>
-    <p:sldId id="261" r:id="R112fccb0fced45ba"/>
-    <p:sldId id="262" r:id="R442c283c6d214af7"/>
+    <p:sldId id="256" r:id="Rd6322bbf41e7443d"/>
+    <p:sldId id="257" r:id="Rcc24869dac27439f"/>
+    <p:sldId id="258" r:id="Re24ab5fc8cb84b1e"/>
+    <p:sldId id="259" r:id="R8f2a89ceb56e4b78"/>
+    <p:sldId id="260" r:id="Rcb6bd75cfd394936"/>
+    <p:sldId id="261" r:id="Ra2931761b253431a"/>
+    <p:sldId id="262" r:id="R7a0c95f2e9e34552"/>
+    <p:sldId id="263" r:id="R149bcaefcdc24636"/>
   </p:sldIdLst>
   <p:sldSz cx="12192000" cy="6858000"/>
   <p:notesSz cx="6858000" cy="9144000"/>
@@ -611,7 +612,7 @@
           <a:p xmlns:a="http://schemas.openxmlformats.org/drawingml/2006/main">
             <a:r>
               <a:rPr lang="en-US"/>
-              <a:t>Date includes lead time.</a:t>
+              <a:t>Agent/human: answer who/stakes/decision from this slide alone. Recommend=HelixSim 3-year +20 seats; start PO immediately. by 2026-06-05 (includes vendor lead time).</a:t>
             </a:r>
           </a:p>
         </p:txBody>
@@ -666,7 +667,7 @@
           <a:p xmlns:a="http://schemas.openxmlformats.org/drawingml/2006/main">
             <a:r>
               <a:rPr lang="en-US"/>
-              <a:t>Musts first.</a:t>
+              <a:t>Date includes lead time.</a:t>
             </a:r>
           </a:p>
         </p:txBody>
@@ -721,7 +722,7 @@
           <a:p xmlns:a="http://schemas.openxmlformats.org/drawingml/2006/main">
             <a:r>
               <a:rPr lang="en-US"/>
-              <a:t>Adoption metrics explicit.</a:t>
+              <a:t>Musts first.</a:t>
             </a:r>
           </a:p>
         </p:txBody>
@@ -776,7 +777,7 @@
           <a:p xmlns:a="http://schemas.openxmlformats.org/drawingml/2006/main">
             <a:r>
               <a:rPr lang="en-US"/>
-              <a:t>Walk trade-offs; land recommendation.</a:t>
+              <a:t>Adoption metrics explicit.</a:t>
             </a:r>
           </a:p>
         </p:txBody>
@@ -790,6 +791,61 @@
 </file>
 
 <file path=ppt/notesSlides/notesSlide7.xml><?xml version="1.0" encoding="utf-8"?>
+<p:notes xmlns:p="http://schemas.openxmlformats.org/presentationml/2006/main">
+  <p:cSld>
+    <p:spTree>
+      <p:nvGrpSpPr>
+        <p:cNvPr id="1" name=""/>
+        <p:cNvGrpSpPr/>
+        <p:nvPr/>
+      </p:nvGrpSpPr>
+      <p:grpSpPr>
+        <a:xfrm xmlns:a="http://schemas.openxmlformats.org/drawingml/2006/main"/>
+      </p:grpSpPr>
+      <p:sp>
+        <p:nvSpPr>
+          <p:cNvPr id="2" name="Slide Image Placeholder 1"/>
+          <p:cNvSpPr/>
+          <p:nvPr>
+            <p:ph type="sldImg" idx="0"/>
+          </p:nvPr>
+        </p:nvSpPr>
+        <p:spPr/>
+        <p:txBody>
+          <a:bodyPr xmlns:a="http://schemas.openxmlformats.org/drawingml/2006/main"/>
+          <a:lstStyle xmlns:a="http://schemas.openxmlformats.org/drawingml/2006/main"/>
+          <a:p xmlns:a="http://schemas.openxmlformats.org/drawingml/2006/main"/>
+        </p:txBody>
+      </p:sp>
+      <p:sp>
+        <p:nvSpPr>
+          <p:cNvPr id="3" name="Notes Placeholder 2"/>
+          <p:cNvSpPr/>
+          <p:nvPr>
+            <p:ph type="body" idx="1"/>
+          </p:nvPr>
+        </p:nvSpPr>
+        <p:spPr/>
+        <p:txBody>
+          <a:bodyPr xmlns:a="http://schemas.openxmlformats.org/drawingml/2006/main"/>
+          <a:lstStyle xmlns:a="http://schemas.openxmlformats.org/drawingml/2006/main"/>
+          <a:p xmlns:a="http://schemas.openxmlformats.org/drawingml/2006/main">
+            <a:r>
+              <a:rPr lang="en-US"/>
+              <a:t>Walk trade-offs; land recommendation.</a:t>
+            </a:r>
+          </a:p>
+        </p:txBody>
+      </p:sp>
+    </p:spTree>
+  </p:cSld>
+  <p:clrMapOvr>
+    <a:masterClrMapping xmlns:a="http://schemas.openxmlformats.org/drawingml/2006/main"/>
+  </p:clrMapOvr>
+</p:notes>
+</file>
+
+<file path=ppt/notesSlides/notesSlide8.xml><?xml version="1.0" encoding="utf-8"?>
 <p:notes xmlns:p="http://schemas.openxmlformats.org/presentationml/2006/main">
   <p:cSld>
     <p:spTree>
@@ -1567,6 +1623,387 @@
 
 <file path=ppt/slides/slide3.xml><?xml version="1.0" encoding="utf-8"?>
 <p:sld xmlns:p="http://schemas.openxmlformats.org/presentationml/2006/main">
+  <p:cSld name="Situation &amp; decision card">
+    <p:bg>
+      <p:bgPr>
+        <a:solidFill xmlns:a="http://schemas.openxmlformats.org/drawingml/2006/main">
+          <a:srgbClr val="F4F7FC"/>
+        </a:solidFill>
+      </p:bgPr>
+    </p:bg>
+    <p:spTree>
+      <p:nvGrpSpPr>
+        <p:cNvPr id="1" name=""/>
+        <p:cNvGrpSpPr/>
+        <p:nvPr/>
+      </p:nvGrpSpPr>
+      <p:grpSpPr/>
+      <p:sp>
+        <p:nvSpPr>
+          <p:cNvPr id="100009" name="TextBox 1"/>
+          <p:cNvSpPr txBox="1"/>
+          <p:nvPr/>
+        </p:nvSpPr>
+        <p:spPr>
+          <a:xfrm xmlns:a="http://schemas.openxmlformats.org/drawingml/2006/main">
+            <a:off x="504000" y="270000"/>
+            <a:ext cx="11088000" cy="270000"/>
+          </a:xfrm>
+          <a:prstGeom xmlns:a="http://schemas.openxmlformats.org/drawingml/2006/main" prst="rect">
+            <a:avLst/>
+          </a:prstGeom>
+        </p:spPr>
+        <p:txBody>
+          <a:bodyPr xmlns:a="http://schemas.openxmlformats.org/drawingml/2006/main"/>
+          <a:lstStyle xmlns:a="http://schemas.openxmlformats.org/drawingml/2006/main"/>
+          <a:p xmlns:a="http://schemas.openxmlformats.org/drawingml/2006/main">
+            <a:r>
+              <a:rPr lang="en-US" sz="1100" b="1">
+                <a:solidFill>
+                  <a:srgbClr val="2B6CB0"/>
+                </a:solidFill>
+                <a:latin typeface="Calibri"/>
+                <a:ea typeface="Calibri"/>
+              </a:rPr>
+              <a:t>READ THIS BEFORE THE DETAILS</a:t>
+            </a:r>
+          </a:p>
+        </p:txBody>
+      </p:sp>
+      <p:sp>
+        <p:nvSpPr>
+          <p:cNvPr id="100010" name="TextBox 2"/>
+          <p:cNvSpPr txBox="1"/>
+          <p:nvPr/>
+        </p:nvSpPr>
+        <p:spPr>
+          <a:xfrm xmlns:a="http://schemas.openxmlformats.org/drawingml/2006/main">
+            <a:off x="504000" y="558000"/>
+            <a:ext cx="11088000" cy="612000"/>
+          </a:xfrm>
+          <a:prstGeom xmlns:a="http://schemas.openxmlformats.org/drawingml/2006/main" prst="rect">
+            <a:avLst/>
+          </a:prstGeom>
+        </p:spPr>
+        <p:txBody>
+          <a:bodyPr xmlns:a="http://schemas.openxmlformats.org/drawingml/2006/main"/>
+          <a:lstStyle xmlns:a="http://schemas.openxmlformats.org/drawingml/2006/main"/>
+          <a:p xmlns:a="http://schemas.openxmlformats.org/drawingml/2006/main">
+            <a:r>
+              <a:rPr lang="en-US" sz="2800" b="1">
+                <a:solidFill>
+                  <a:srgbClr val="1A202C"/>
+                </a:solidFill>
+                <a:latin typeface="Calibri"/>
+                <a:ea typeface="Calibri"/>
+              </a:rPr>
+              <a:t>Situation &amp; decision card</a:t>
+            </a:r>
+          </a:p>
+        </p:txBody>
+      </p:sp>
+      <p:sp>
+        <p:nvSpPr>
+          <p:cNvPr id="100011" name="TextBox 3"/>
+          <p:cNvSpPr txBox="1"/>
+          <p:nvPr/>
+        </p:nvSpPr>
+        <p:spPr>
+          <a:xfrm xmlns:a="http://schemas.openxmlformats.org/drawingml/2006/main">
+            <a:off x="504000" y="1224000"/>
+            <a:ext cx="11088000" cy="4968000"/>
+          </a:xfrm>
+          <a:prstGeom xmlns:a="http://schemas.openxmlformats.org/drawingml/2006/main" prst="rect">
+            <a:avLst/>
+          </a:prstGeom>
+          <a:solidFill xmlns:a="http://schemas.openxmlformats.org/drawingml/2006/main">
+            <a:srgbClr val="FFFFFF"/>
+          </a:solidFill>
+        </p:spPr>
+        <p:txBody>
+          <a:bodyPr xmlns:a="http://schemas.openxmlformats.org/drawingml/2006/main"/>
+          <a:lstStyle xmlns:a="http://schemas.openxmlformats.org/drawingml/2006/main"/>
+          <a:p xmlns:a="http://schemas.openxmlformats.org/drawingml/2006/main">
+            <a:r>
+              <a:rPr lang="en-US" sz="1300" b="0">
+                <a:solidFill>
+                  <a:srgbClr val="1A202C"/>
+                </a:solidFill>
+                <a:latin typeface="Calibri"/>
+                <a:ea typeface="Calibri"/>
+              </a:rPr>
+              <a:t>Presenter: Alex Chen — EM (with procurement/finance)</a:t>
+            </a:r>
+          </a:p>
+          <a:p xmlns:a="http://schemas.openxmlformats.org/drawingml/2006/main">
+            <a:r>
+              <a:rPr lang="en-US" sz="1300" b="0">
+                <a:solidFill>
+                  <a:srgbClr val="1A202C"/>
+                </a:solidFill>
+                <a:latin typeface="Calibri"/>
+                <a:ea typeface="Calibri"/>
+              </a:rPr>
+              <a:t>Decision-maker: Morgan → Finance → Procurement chain</a:t>
+            </a:r>
+          </a:p>
+          <a:p xmlns:a="http://schemas.openxmlformats.org/drawingml/2006/main">
+            <a:r>
+              <a:rPr lang="en-US" sz="1300" b="0">
+                <a:solidFill>
+                  <a:srgbClr val="1A202C"/>
+                </a:solidFill>
+                <a:latin typeface="Calibri"/>
+                <a:ea typeface="Calibri"/>
+              </a:rPr>
+              <a:t>Audience: Eng + finance + procurement</a:t>
+            </a:r>
+          </a:p>
+          <a:p xmlns:a="http://schemas.openxmlformats.org/drawingml/2006/main">
+            <a:r>
+              <a:rPr lang="en-US" sz="1300" b="0">
+                <a:solidFill>
+                  <a:srgbClr val="1A202C"/>
+                </a:solidFill>
+                <a:latin typeface="Calibri"/>
+                <a:ea typeface="Calibri"/>
+              </a:rPr>
+              <a:t/>
+            </a:r>
+          </a:p>
+          <a:p xmlns:a="http://schemas.openxmlformats.org/drawingml/2006/main">
+            <a:r>
+              <a:rPr lang="en-US" sz="1300" b="0">
+                <a:solidFill>
+                  <a:srgbClr val="1A202C"/>
+                </a:solidFill>
+                <a:latin typeface="Calibri"/>
+                <a:ea typeface="Calibri"/>
+              </a:rPr>
+              <a:t>What just happened / context:</a:t>
+            </a:r>
+          </a:p>
+          <a:p xmlns:a="http://schemas.openxmlformats.org/drawingml/2006/main">
+            <a:r>
+              <a:rPr lang="en-US" sz="1300" b="0">
+                <a:solidFill>
+                  <a:srgbClr val="1A202C"/>
+                </a:solidFill>
+                <a:latin typeface="Calibri"/>
+                <a:ea typeface="Calibri"/>
+              </a:rPr>
+              <a:t>HelixSim contract ends 2026-07-31. Farm expand (deck 04 ask by 5/30) needs concurrent seats. Vendor lead time ~45 days → decide by 2026-06-05 or miss deploy before H2 peak.</a:t>
+            </a:r>
+          </a:p>
+          <a:p xmlns:a="http://schemas.openxmlformats.org/drawingml/2006/main">
+            <a:r>
+              <a:rPr lang="en-US" sz="1300" b="0">
+                <a:solidFill>
+                  <a:srgbClr val="1A202C"/>
+                </a:solidFill>
+                <a:latin typeface="Calibri"/>
+                <a:ea typeface="Calibri"/>
+              </a:rPr>
+              <a:t/>
+            </a:r>
+          </a:p>
+          <a:p xmlns:a="http://schemas.openxmlformats.org/drawingml/2006/main">
+            <a:r>
+              <a:rPr lang="en-US" sz="1300" b="0">
+                <a:solidFill>
+                  <a:srgbClr val="1A202C"/>
+                </a:solidFill>
+                <a:latin typeface="Calibri"/>
+                <a:ea typeface="Calibri"/>
+              </a:rPr>
+              <a:t>Stakes if we get this wrong:</a:t>
+            </a:r>
+          </a:p>
+          <a:p xmlns:a="http://schemas.openxmlformats.org/drawingml/2006/main">
+            <a:r>
+              <a:rPr lang="en-US" sz="1300" b="0">
+                <a:solidFill>
+                  <a:srgbClr val="1A202C"/>
+                </a:solidFill>
+                <a:latin typeface="Calibri"/>
+                <a:ea typeface="Calibri"/>
+              </a:rPr>
+              <a:t>Late PO = sim queue explosion during revB/sample support; switching to NovaSim costs 4–6 months port.</a:t>
+            </a:r>
+          </a:p>
+          <a:p xmlns:a="http://schemas.openxmlformats.org/drawingml/2006/main">
+            <a:r>
+              <a:rPr lang="en-US" sz="1300" b="0">
+                <a:solidFill>
+                  <a:srgbClr val="1A202C"/>
+                </a:solidFill>
+                <a:latin typeface="Calibri"/>
+                <a:ea typeface="Calibri"/>
+              </a:rPr>
+              <a:t/>
+            </a:r>
+          </a:p>
+          <a:p xmlns:a="http://schemas.openxmlformats.org/drawingml/2006/main">
+            <a:r>
+              <a:rPr lang="en-US" sz="1300" b="0">
+                <a:solidFill>
+                  <a:srgbClr val="1A202C"/>
+                </a:solidFill>
+                <a:latin typeface="Calibri"/>
+                <a:ea typeface="Calibri"/>
+              </a:rPr>
+              <a:t>Decision needed:</a:t>
+            </a:r>
+          </a:p>
+          <a:p xmlns:a="http://schemas.openxmlformats.org/drawingml/2006/main">
+            <a:r>
+              <a:rPr lang="en-US" sz="1300" b="0">
+                <a:solidFill>
+                  <a:srgbClr val="1A202C"/>
+                </a:solidFill>
+                <a:latin typeface="Calibri"/>
+                <a:ea typeface="Calibri"/>
+              </a:rPr>
+              <a:t>HelixSim 3yr +20 (REC) vs switch NovaSim vs short 6-mo extend.</a:t>
+            </a:r>
+          </a:p>
+          <a:p xmlns:a="http://schemas.openxmlformats.org/drawingml/2006/main">
+            <a:r>
+              <a:rPr lang="en-US" sz="1300" b="0">
+                <a:solidFill>
+                  <a:srgbClr val="1A202C"/>
+                </a:solidFill>
+                <a:latin typeface="Calibri"/>
+                <a:ea typeface="Calibri"/>
+              </a:rPr>
+              <a:t/>
+            </a:r>
+          </a:p>
+          <a:p xmlns:a="http://schemas.openxmlformats.org/drawingml/2006/main">
+            <a:r>
+              <a:rPr lang="en-US" sz="1300" b="0">
+                <a:solidFill>
+                  <a:srgbClr val="1A202C"/>
+                </a:solidFill>
+                <a:latin typeface="Calibri"/>
+                <a:ea typeface="Calibri"/>
+              </a:rPr>
+              <a:t>Recommendation: HelixSim 3-year +20 seats; start PO immediately.</a:t>
+            </a:r>
+          </a:p>
+          <a:p xmlns:a="http://schemas.openxmlformats.org/drawingml/2006/main">
+            <a:r>
+              <a:rPr lang="en-US" sz="1300" b="0">
+                <a:solidFill>
+                  <a:srgbClr val="1A202C"/>
+                </a:solidFill>
+                <a:latin typeface="Calibri"/>
+                <a:ea typeface="Calibri"/>
+              </a:rPr>
+              <a:t>If YES: Seats land ~3 weeks after PO; p95 queue target &lt;30 min in freeze windows.</a:t>
+            </a:r>
+          </a:p>
+          <a:p xmlns:a="http://schemas.openxmlformats.org/drawingml/2006/main">
+            <a:r>
+              <a:rPr lang="en-US" sz="1300" b="0">
+                <a:solidFill>
+                  <a:srgbClr val="1A202C"/>
+                </a:solidFill>
+                <a:latin typeface="Calibri"/>
+                <a:ea typeface="Calibri"/>
+              </a:rPr>
+              <a:t>If NO / delay: Short extend is expensive band-aid; switch burns schedule.</a:t>
+            </a:r>
+          </a:p>
+          <a:p xmlns:a="http://schemas.openxmlformats.org/drawingml/2006/main">
+            <a:r>
+              <a:rPr lang="en-US" sz="1300" b="0">
+                <a:solidFill>
+                  <a:srgbClr val="1A202C"/>
+                </a:solidFill>
+                <a:latin typeface="Calibri"/>
+                <a:ea typeface="Calibri"/>
+              </a:rPr>
+              <a:t/>
+            </a:r>
+          </a:p>
+          <a:p xmlns:a="http://schemas.openxmlformats.org/drawingml/2006/main">
+            <a:r>
+              <a:rPr lang="en-US" sz="1300" b="0">
+                <a:solidFill>
+                  <a:srgbClr val="1A202C"/>
+                </a:solidFill>
+                <a:latin typeface="Calibri"/>
+                <a:ea typeface="Calibri"/>
+              </a:rPr>
+              <a:t>Decide by: 2026-06-05 (includes vendor lead time)</a:t>
+            </a:r>
+          </a:p>
+          <a:p xmlns:a="http://schemas.openxmlformats.org/drawingml/2006/main">
+            <a:r>
+              <a:rPr lang="en-US" sz="1300" b="0">
+                <a:solidFill>
+                  <a:srgbClr val="1A202C"/>
+                </a:solidFill>
+                <a:latin typeface="Calibri"/>
+                <a:ea typeface="Calibri"/>
+              </a:rPr>
+              <a:t>Arc prior: 04 farm expand decision; 02/09 load growth</a:t>
+            </a:r>
+          </a:p>
+          <a:p xmlns:a="http://schemas.openxmlformats.org/drawingml/2006/main">
+            <a:r>
+              <a:rPr lang="en-US" sz="1300" b="0">
+                <a:solidFill>
+                  <a:srgbClr val="1A202C"/>
+                </a:solidFill>
+                <a:latin typeface="Calibri"/>
+                <a:ea typeface="Calibri"/>
+              </a:rPr>
+              <a:t>Arc next: 07 H2 roadmap assumes seats available</a:t>
+            </a:r>
+          </a:p>
+        </p:txBody>
+      </p:sp>
+      <p:sp>
+        <p:nvSpPr>
+          <p:cNvPr id="100012" name="TextBox 4"/>
+          <p:cNvSpPr txBox="1"/>
+          <p:nvPr/>
+        </p:nvSpPr>
+        <p:spPr>
+          <a:xfrm xmlns:a="http://schemas.openxmlformats.org/drawingml/2006/main">
+            <a:off x="504000" y="6426000"/>
+            <a:ext cx="11088000" cy="306000"/>
+          </a:xfrm>
+          <a:prstGeom xmlns:a="http://schemas.openxmlformats.org/drawingml/2006/main" prst="rect">
+            <a:avLst/>
+          </a:prstGeom>
+        </p:spPr>
+        <p:txBody>
+          <a:bodyPr xmlns:a="http://schemas.openxmlformats.org/drawingml/2006/main"/>
+          <a:lstStyle xmlns:a="http://schemas.openxmlformats.org/drawingml/2006/main"/>
+          <a:p xmlns:a="http://schemas.openxmlformats.org/drawingml/2006/main">
+            <a:r>
+              <a:rPr lang="en-US" sz="1100" b="0">
+                <a:solidFill>
+                  <a:srgbClr val="718096"/>
+                </a:solidFill>
+                <a:latin typeface="Calibri"/>
+                <a:ea typeface="Calibri"/>
+              </a:rPr>
+              <a:t>Atlas Platform  ·  Project Aurora  ·  NovaSemi  ·  2026</a:t>
+            </a:r>
+          </a:p>
+        </p:txBody>
+      </p:sp>
+    </p:spTree>
+  </p:cSld>
+</p:sld>
+</file>
+
+<file path=ppt/slides/slide4.xml><?xml version="1.0" encoding="utf-8"?>
+<p:sld xmlns:p="http://schemas.openxmlformats.org/presentationml/2006/main">
   <p:cSld name="BLUF — renew HelixSim 3yr +20 seats">
     <p:bg>
       <p:bgPr>
@@ -1584,7 +2021,7 @@
       <p:grpSpPr/>
       <p:sp>
         <p:nvSpPr>
-          <p:cNvPr id="100009" name="TextBox 1"/>
+          <p:cNvPr id="100013" name="TextBox 1"/>
           <p:cNvSpPr txBox="1"/>
           <p:nvPr/>
         </p:nvSpPr>
@@ -1616,7 +2053,7 @@
       </p:sp>
       <p:sp>
         <p:nvSpPr>
-          <p:cNvPr id="100010" name="TextBox 2"/>
+          <p:cNvPr id="100014" name="TextBox 2"/>
           <p:cNvSpPr txBox="1"/>
           <p:nvPr/>
         </p:nvSpPr>
@@ -1648,7 +2085,7 @@
       </p:sp>
       <p:sp>
         <p:nvSpPr>
-          <p:cNvPr id="100011" name="TextBox 3"/>
+          <p:cNvPr id="100015" name="TextBox 3"/>
           <p:cNvSpPr txBox="1"/>
           <p:nvPr/>
         </p:nvSpPr>
@@ -1683,7 +2120,7 @@
       </p:sp>
       <p:sp>
         <p:nvSpPr>
-          <p:cNvPr id="100012" name="TextBox 4"/>
+          <p:cNvPr id="100016" name="TextBox 4"/>
           <p:cNvSpPr txBox="1"/>
           <p:nvPr/>
         </p:nvSpPr>
@@ -1766,7 +2203,7 @@
       </p:sp>
       <p:sp>
         <p:nvSpPr>
-          <p:cNvPr id="100013" name="TextBox 5"/>
+          <p:cNvPr id="100017" name="TextBox 5"/>
           <p:cNvSpPr txBox="1"/>
           <p:nvPr/>
         </p:nvSpPr>
@@ -1801,7 +2238,7 @@
 </p:sld>
 </file>
 
-<file path=ppt/slides/slide4.xml><?xml version="1.0" encoding="utf-8"?>
+<file path=ppt/slides/slide5.xml><?xml version="1.0" encoding="utf-8"?>
 <p:sld xmlns:p="http://schemas.openxmlformats.org/presentationml/2006/main">
   <p:cSld name="Requirements (must / should)">
     <p:bg>
@@ -1820,7 +2257,7 @@
       <p:grpSpPr/>
       <p:sp>
         <p:nvSpPr>
-          <p:cNvPr id="100014" name="TextBox 1"/>
+          <p:cNvPr id="100018" name="TextBox 1"/>
           <p:cNvSpPr txBox="1"/>
           <p:nvPr/>
         </p:nvSpPr>
@@ -1852,7 +2289,7 @@
       </p:sp>
       <p:sp>
         <p:nvSpPr>
-          <p:cNvPr id="100015" name="TextBox 2"/>
+          <p:cNvPr id="100019" name="TextBox 2"/>
           <p:cNvSpPr txBox="1"/>
           <p:nvPr/>
         </p:nvSpPr>
@@ -1911,7 +2348,7 @@
       </p:sp>
       <p:sp>
         <p:nvSpPr>
-          <p:cNvPr id="100016" name="TextBox 3"/>
+          <p:cNvPr id="100020" name="TextBox 3"/>
           <p:cNvSpPr txBox="1"/>
           <p:nvPr/>
         </p:nvSpPr>
@@ -1946,7 +2383,7 @@
 </p:sld>
 </file>
 
-<file path=ppt/slides/slide5.xml><?xml version="1.0" encoding="utf-8"?>
+<file path=ppt/slides/slide6.xml><?xml version="1.0" encoding="utf-8"?>
 <p:sld xmlns:p="http://schemas.openxmlformats.org/presentationml/2006/main">
   <p:cSld name="Implementation plan">
     <p:bg>
@@ -1965,7 +2402,7 @@
       <p:grpSpPr/>
       <p:sp>
         <p:nvSpPr>
-          <p:cNvPr id="100017" name="TextBox 1"/>
+          <p:cNvPr id="100021" name="TextBox 1"/>
           <p:cNvSpPr txBox="1"/>
           <p:nvPr/>
         </p:nvSpPr>
@@ -1997,7 +2434,7 @@
       </p:sp>
       <p:sp>
         <p:nvSpPr>
-          <p:cNvPr id="100018" name="TextBox 2"/>
+          <p:cNvPr id="100022" name="TextBox 2"/>
           <p:cNvSpPr txBox="1"/>
           <p:nvPr/>
         </p:nvSpPr>
@@ -2092,7 +2529,7 @@
       </p:sp>
       <p:sp>
         <p:nvSpPr>
-          <p:cNvPr id="100019" name="TextBox 3"/>
+          <p:cNvPr id="100023" name="TextBox 3"/>
           <p:cNvSpPr txBox="1"/>
           <p:nvPr/>
         </p:nvSpPr>
@@ -2127,7 +2564,7 @@
 </p:sld>
 </file>
 
-<file path=ppt/slides/slide6.xml><?xml version="1.0" encoding="utf-8"?>
+<file path=ppt/slides/slide7.xml><?xml version="1.0" encoding="utf-8"?>
 <p:sld xmlns:p="http://schemas.openxmlformats.org/presentationml/2006/main">
   <p:cSld name="Options &amp; recommendation">
     <p:bg>
@@ -2146,7 +2583,7 @@
       <p:grpSpPr/>
       <p:sp>
         <p:nvSpPr>
-          <p:cNvPr id="100020" name="TextBox 1"/>
+          <p:cNvPr id="100024" name="TextBox 1"/>
           <p:cNvSpPr txBox="1"/>
           <p:nvPr/>
         </p:nvSpPr>
@@ -2178,7 +2615,7 @@
       </p:sp>
       <p:sp>
         <p:nvSpPr>
-          <p:cNvPr id="100021" name="TextBox 2"/>
+          <p:cNvPr id="100025" name="TextBox 2"/>
           <p:cNvSpPr txBox="1"/>
           <p:nvPr/>
         </p:nvSpPr>
@@ -2210,7 +2647,7 @@
       </p:sp>
       <p:graphicFrame>
         <p:nvGraphicFramePr>
-          <p:cNvPr id="100022" name="Table 1"/>
+          <p:cNvPr id="100026" name="Table 1"/>
           <p:cNvGraphicFramePr/>
           <p:nvPr/>
         </p:nvGraphicFramePr>
@@ -2703,7 +3140,7 @@
       </p:graphicFrame>
       <p:sp>
         <p:nvSpPr>
-          <p:cNvPr id="100023" name="TextBox 3"/>
+          <p:cNvPr id="100027" name="TextBox 3"/>
           <p:cNvSpPr txBox="1"/>
           <p:nvPr/>
         </p:nvSpPr>
@@ -2738,7 +3175,7 @@
 </p:sld>
 </file>
 
-<file path=ppt/slides/slide7.xml><?xml version="1.0" encoding="utf-8"?>
+<file path=ppt/slides/slide8.xml><?xml version="1.0" encoding="utf-8"?>
 <p:sld xmlns:p="http://schemas.openxmlformats.org/presentationml/2006/main">
   <p:cSld name="Decision &amp; ask">
     <p:bg>
@@ -2757,7 +3194,7 @@
       <p:grpSpPr/>
       <p:sp>
         <p:nvSpPr>
-          <p:cNvPr id="100024" name="TextBox 1"/>
+          <p:cNvPr id="100028" name="TextBox 1"/>
           <p:cNvSpPr txBox="1"/>
           <p:nvPr/>
         </p:nvSpPr>
@@ -2789,7 +3226,7 @@
       </p:sp>
       <p:sp>
         <p:nvSpPr>
-          <p:cNvPr id="100025" name="TextBox 2"/>
+          <p:cNvPr id="100029" name="TextBox 2"/>
           <p:cNvSpPr txBox="1"/>
           <p:nvPr/>
         </p:nvSpPr>
@@ -2821,7 +3258,7 @@
       </p:sp>
       <p:sp>
         <p:nvSpPr>
-          <p:cNvPr id="100026" name="TextBox 3"/>
+          <p:cNvPr id="100030" name="TextBox 3"/>
           <p:cNvSpPr txBox="1"/>
           <p:nvPr/>
         </p:nvSpPr>
@@ -2880,7 +3317,7 @@
       </p:sp>
       <p:sp>
         <p:nvSpPr>
-          <p:cNvPr id="100027" name="TextBox 4"/>
+          <p:cNvPr id="100031" name="TextBox 4"/>
           <p:cNvSpPr txBox="1"/>
           <p:nvPr/>
         </p:nvSpPr>

--- a/skills/presentations/assets/pptx/examples/05-procurement-proposal.pptx
+++ b/skills/presentations/assets/pptx/examples/05-procurement-proposal.pptx
@@ -5,17 +5,17 @@
     <p:sldMasterId xmlns:r="http://schemas.openxmlformats.org/officeDocument/2006/relationships" id="2147483648" r:id="rId1"/>
   </p:sldMasterIdLst>
   <p:notesMasterIdLst>
-    <p:notesMasterId r:id="R5c36316caecb4f22"/>
+    <p:notesMasterId r:id="R1b3a3096a6fb4329"/>
   </p:notesMasterIdLst>
   <p:sldIdLst>
-    <p:sldId id="256" r:id="Rd6322bbf41e7443d"/>
-    <p:sldId id="257" r:id="Rcc24869dac27439f"/>
-    <p:sldId id="258" r:id="Re24ab5fc8cb84b1e"/>
-    <p:sldId id="259" r:id="R8f2a89ceb56e4b78"/>
-    <p:sldId id="260" r:id="Rcb6bd75cfd394936"/>
-    <p:sldId id="261" r:id="Ra2931761b253431a"/>
-    <p:sldId id="262" r:id="R7a0c95f2e9e34552"/>
-    <p:sldId id="263" r:id="R149bcaefcdc24636"/>
+    <p:sldId id="256" r:id="R9d310352f2d74779"/>
+    <p:sldId id="257" r:id="Rd30dad547da14f4d"/>
+    <p:sldId id="258" r:id="R3c18af5b51a14116"/>
+    <p:sldId id="259" r:id="Ree956f73b20343ec"/>
+    <p:sldId id="260" r:id="Re9acbee6ceb04837"/>
+    <p:sldId id="261" r:id="Rf577324d0b894af7"/>
+    <p:sldId id="262" r:id="Re24c7e1e91324581"/>
+    <p:sldId id="263" r:id="R06aac92ba0534520"/>
   </p:sldIdLst>
   <p:sldSz cx="12192000" cy="6858000"/>
   <p:notesSz cx="6858000" cy="9144000"/>
@@ -1948,7 +1948,7 @@
                 <a:latin typeface="Calibri"/>
                 <a:ea typeface="Calibri"/>
               </a:rPr>
-              <a:t>Arc prior: 04 farm expand decision; 02/09 load growth</a:t>
+              <a:t>Arc prior: 04 farm expand decision (5/25–5/30); 02 silicon/sample load growth</a:t>
             </a:r>
           </a:p>
           <a:p xmlns:a="http://schemas.openxmlformats.org/drawingml/2006/main">

--- a/skills/presentations/assets/pptx/examples/05-procurement-proposal.pptx
+++ b/skills/presentations/assets/pptx/examples/05-procurement-proposal.pptx
@@ -5,17 +5,17 @@
     <p:sldMasterId xmlns:r="http://schemas.openxmlformats.org/officeDocument/2006/relationships" id="2147483648" r:id="rId1"/>
   </p:sldMasterIdLst>
   <p:notesMasterIdLst>
-    <p:notesMasterId r:id="R1b3a3096a6fb4329"/>
+    <p:notesMasterId r:id="R5cb5a18820604bb5"/>
   </p:notesMasterIdLst>
   <p:sldIdLst>
-    <p:sldId id="256" r:id="R9d310352f2d74779"/>
-    <p:sldId id="257" r:id="Rd30dad547da14f4d"/>
-    <p:sldId id="258" r:id="R3c18af5b51a14116"/>
-    <p:sldId id="259" r:id="Ree956f73b20343ec"/>
-    <p:sldId id="260" r:id="Re9acbee6ceb04837"/>
-    <p:sldId id="261" r:id="Rf577324d0b894af7"/>
-    <p:sldId id="262" r:id="Re24c7e1e91324581"/>
-    <p:sldId id="263" r:id="R06aac92ba0534520"/>
+    <p:sldId id="256" r:id="R922a042cab9e4a56"/>
+    <p:sldId id="257" r:id="Rc8a63c13af604363"/>
+    <p:sldId id="258" r:id="R6a15db2cc20a4221"/>
+    <p:sldId id="259" r:id="Rbc9ba80d1ad04ee9"/>
+    <p:sldId id="260" r:id="Rdd58f172d2644fd3"/>
+    <p:sldId id="261" r:id="R11f79a7efbf34133"/>
+    <p:sldId id="262" r:id="Re8ab6183fcc94b19"/>
+    <p:sldId id="263" r:id="R441b5b362f8d44af"/>
   </p:sldIdLst>
   <p:sldSz cx="12192000" cy="6858000"/>
   <p:notesSz cx="6858000" cy="9144000"/>
@@ -1579,7 +1579,19 @@
                 <a:latin typeface="Calibri"/>
                 <a:ea typeface="Calibri"/>
               </a:rPr>
-              <a:t>In-repo: skills/presentations/classic-public-cases.md</a:t>
+              <a:t>CONTENT TEMPLATE ONLY — do not copy visual design (colors, margins, fonts) as a brand system.</a:t>
+            </a:r>
+          </a:p>
+          <a:p xmlns:a="http://schemas.openxmlformats.org/drawingml/2006/main">
+            <a:r>
+              <a:rPr lang="en-US" sz="1500" b="0">
+                <a:solidFill>
+                  <a:srgbClr val="1A202C"/>
+                </a:solidFill>
+                <a:latin typeface="Calibri"/>
+                <a:ea typeface="Calibri"/>
+              </a:rPr>
+              <a:t>In-repo: skills/presentations/classic-public-cases.md · assets/README.md (agent notice)</a:t>
             </a:r>
           </a:p>
         </p:txBody>
